--- a/decks/hist-mughal-india/hist-mughal-india_ch5_decline.pptx
+++ b/decks/hist-mughal-india/hist-mughal-india_ch5_decline.pptx
@@ -126,30 +126,30 @@
   <p:extLst>
     <p:ext uri="{521415D9-36F7-43E2-AB2F-B90AF26B5E84}">
       <p14:sectionLst xmlns:p14="http://schemas.microsoft.com/office/powerpoint/2010/main">
-        <p14:section name="Opening" id="{88ec8179-0340-5da5-51c2-73b0829a441d}">
+        <p14:section name="Opening" id="{b9bbbf4e-2b52-a8e2-f97f-f9afa909a527}">
           <p14:sldIdLst>
             <p14:sldId id="256"/>
           </p14:sldIdLst>
         </p14:section>
-        <p14:section name="Gate" id="{aeb875aa-ff94-7c13-1aec-ba019f679cd4}">
+        <p14:section name="Gate" id="{4c2f96a5-7380-26f1-2e0a-d4c2c65b694c}">
           <p14:sldIdLst>
             <p14:sldId id="257"/>
             <p14:sldId id="258"/>
           </p14:sldIdLst>
         </p14:section>
-        <p14:section name="Pre-teach" id="{8531b112-42f4-7850-382f-a194e932779b}">
+        <p14:section name="Pre-teach" id="{49d09005-575e-cf5f-22b5-44268dffb41b}">
           <p14:sldIdLst>
             <p14:sldId id="259"/>
             <p14:sldId id="260"/>
           </p14:sldIdLst>
         </p14:section>
-        <p14:section name="Read-along" id="{39960208-4525-c5d6-43dc-52e486b9f47d}">
+        <p14:section name="Read-along" id="{7c98f223-1151-0438-a951-91dafd628e06}">
           <p14:sldIdLst>
             <p14:sldId id="261"/>
             <p14:sldId id="262"/>
           </p14:sldIdLst>
         </p14:section>
-        <p14:section name="Teach" id="{02758ffd-c588-2a58-1061-bde7b0daa5a6}">
+        <p14:section name="Teach" id="{8c5992c8-dcab-5fc0-571c-42edccef2dea}">
           <p14:sldIdLst>
             <p14:sldId id="263"/>
             <p14:sldId id="264"/>
@@ -158,7 +158,7 @@
             <p14:sldId id="267"/>
           </p14:sldIdLst>
         </p14:section>
-        <p14:section name="Routes" id="{ca423cce-34f4-456a-9597-eaf4cdd4ae5e}">
+        <p14:section name="Routes" id="{48e50fa9-ebbe-f91b-c289-fd12ac08ec2c}">
           <p14:sldIdLst>
             <p14:sldId id="268"/>
             <p14:sldId id="269"/>
@@ -166,12 +166,12 @@
             <p14:sldId id="271"/>
           </p14:sldIdLst>
         </p14:section>
-        <p14:section name="Close" id="{87049e63-b88d-de12-8f94-1f4f2e42c461}">
+        <p14:section name="Close" id="{5abc0754-e780-b5e4-43cf-c37a0353651a}">
           <p14:sldIdLst>
             <p14:sldId id="272"/>
           </p14:sldIdLst>
         </p14:section>
-        <p14:section name="Answers" id="{9d6b46f5-31d9-2b56-6eee-945b4d6de984}">
+        <p14:section name="Answers" id="{2b169d3b-f7fe-4617-3a19-d5b90289255f}">
           <p14:sldIdLst>
             <p14:sldId id="273"/>
             <p14:sldId id="274"/>
@@ -674,7 +674,7 @@
             <a:r>
               <a:rPr lang="en-US" dirty="0"/>
               <a:t>Teach — Factor two: poor leadership. Say it in your own words, then check understanding with a quick question: ask a pupil from the pre-teach group first, since they met these words and ideas before the lesson. Pupils try to recall before you re-explain.
-Under Aurangzeb, the peasants of India had to pay 50 per cent of their income, half of everything they earned, to the Emperor. The peasants in the countryside were very unhappy with their government, and many revolted.
+Under Aurangzeb, the peasants of India had to pay 50 per cent of their income, half of everything they earned, to the Emperor. Peasants across the countryside grew bitterly unhappy with the government that taxed them, and many of them revolted.
 Aurangzeb focused on capturing new lands instead of developing the land he already had. It cost the Empire a great deal to conquer and then run new territory that brought no reward. The clearest example is the Deccan, in southern India, where he spent 26 years fighting. The campaign cost over 100,000 Mughal lives and huge amounts of gold.
 Culture suffered too. Aurangzeb banned music at his court, where Akbar had used music to bring the Empire's many cultures together. Few paintings survive from his reign. The things that had made the Mughal court great were allowed to fade.
 Worked example — model it step by step, thinking aloud: Which of the three factors does this reason belong to: Aurangzeb spent 26 years and huge amounts of gold trying to conquer the Deccan? (1) Ask: is this about religion? No, there is no festival, temple or faith involved. (2) Ask: is this about weapons, inventions or a navy? No. (3) Ask: is this a decision by the ruler about how to spend the Empire's money and effort? Yes. (4) So it belongs under poor leadership. Answer: Poor leadership: the Deccan war was a ruler's choice to spend lives and gold on conquest rather than on developing the Empire..</a:t>
@@ -766,7 +766,7 @@
             <a:r>
               <a:rPr lang="en-US" dirty="0"/>
               <a:t>Teach — Factor two: poor leadership. Say it in your own words, then check understanding with a quick question: ask a pupil from the pre-teach group first, since they met these words and ideas before the lesson. Pupils try to recall before you re-explain.
-Under Aurangzeb, the peasants of India had to pay 50 per cent of their income, half of everything they earned, to the Emperor. The peasants in the countryside were very unhappy with their government, and many revolted.
+Under Aurangzeb, the peasants of India had to pay 50 per cent of their income, half of everything they earned, to the Emperor. Peasants across the countryside grew bitterly unhappy with the government that taxed them, and many of them revolted.
 Aurangzeb focused on capturing new lands instead of developing the land he already had. It cost the Empire a great deal to conquer and then run new territory that brought no reward. The clearest example is the Deccan, in southern India, where he spent 26 years fighting. The campaign cost over 100,000 Mughal lives and huge amounts of gold.
 Culture suffered too. Aurangzeb banned music at his court, where Akbar had used music to bring the Empire's many cultures together. Few paintings survive from his reign. The things that had made the Mughal court great were allowed to fade.
 Worked example — model it step by step, thinking aloud: Which of the three factors does this reason belong to: Aurangzeb spent 26 years and huge amounts of gold trying to conquer the Deccan? (1) Ask: is this about religion? No, there is no festival, temple or faith involved. (2) Ask: is this about weapons, inventions or a navy? No. (3) Ask: is this a decision by the ruler about how to spend the Empire's money and effort? Yes. (4) So it belongs under poor leadership. Answer: Poor leadership: the Deccan war was a ruler's choice to spend lives and gold on conquest rather than on developing the Empire..</a:t>
@@ -2351,7 +2351,7 @@
               <a:rPr lang="en-US" dirty="0"/>
               <a:t>Teach — Factor one: religious intolerance. Say it in your own words, then check understanding with a quick question: ask a pupil from the pre-teach group first, since they met these words and ideas before the lesson. Pupils try to recall before you re-explain.
 Akbar had welcomed all religions. Aurangzeb abandoned that policy. He tried to make Islam the religion of the whole Empire, and other religions, especially Hinduism, were persecuted. The Hindu festival of Diwali was banned.
-Aurangzeb favoured Muslims in the laws he passed. Muslims were given tax breaks or paid no tax at all, while non-Muslims had to pay. His policy of temple destruction saw over 80 non-Muslim temples destroyed, and large mosques built in their place.
+Aurangzeb favoured Muslims in the laws he passed. Under those laws Muslims were given tax breaks, or paid nothing at all, while non-Muslims still had to pay. His policy of temple destruction saw over 80 non-Muslim temples destroyed, and large mosques built in their place.
 The effect was to divide Mughal society along religious lines. Akbar had used tolerance to bring people together; Aurangzeb's intolerance pushed them apart, and the divisions helped the Empire split after his death.
 Tip: For intolerance, you have three concrete examples: Diwali banned, over 80 temples destroyed, non-Muslims taxed. Use the numbers and names.</a:t>
             </a:r>
@@ -17909,7 +17909,7 @@
                 <a:ea typeface="Calibri" pitchFamily="34" charset="-122"/>
                 <a:cs typeface="Calibri" pitchFamily="34" charset="-120"/>
               </a:rPr>
-              <a:t>Aurangzeb favoured Muslims in the laws he passed. Muslims were given tax breaks or paid no tax at all, while non-Muslims had to pay.</a:t>
+              <a:t>Aurangzeb favoured Muslims in the laws he passed. Under those laws Muslims were given tax breaks, or paid nothing at all, while non-Muslims still had to pay.</a:t>
             </a:r>
             <a:endParaRPr lang="en-US" sz="2200" dirty="0"/>
           </a:p>
